--- a/Quadro_Aulas_Report_2026-06-10.pptx
+++ b/Quadro_Aulas_Report_2026-06-10.pptx
@@ -1038,7 +1038,7 @@
                   <a:srgbClr val="8FA3C0"/>
                 </a:solidFill>
               </a:rPr>
-              <a:t>10 de Junho de 2026 as 08:39</a:t>
+              <a:t>10 de Junho de 2026 as 09:58</a:t>
             </a:r>
             <a:endParaRPr lang="en-US" sz="700" dirty="0"/>
           </a:p>
@@ -1207,7 +1207,7 @@
                   <a:srgbClr val="4ADE80"/>
                 </a:solidFill>
               </a:rPr>
-              <a:t>253</a:t>
+              <a:t>256</a:t>
             </a:r>
             <a:endParaRPr lang="en-US" sz="2400" dirty="0"/>
           </a:p>
@@ -1279,7 +1279,7 @@
                   <a:srgbClr val="FCD34D"/>
                 </a:solidFill>
               </a:rPr>
-              <a:t>16</a:t>
+              <a:t>15</a:t>
             </a:r>
             <a:endParaRPr lang="en-US" sz="2400" dirty="0"/>
           </a:p>
@@ -1351,7 +1351,7 @@
                   <a:srgbClr val="F87171"/>
                 </a:solidFill>
               </a:rPr>
-              <a:t>79</a:t>
+              <a:t>77</a:t>
             </a:r>
             <a:endParaRPr lang="en-US" sz="2400" dirty="0"/>
           </a:p>
@@ -1427,7 +1427,7 @@
         <p:spPr>
           <a:xfrm>
             <a:off x="137160" y="3538728"/>
-            <a:ext cx="1460754" cy="91440"/>
+            <a:ext cx="1481328" cy="91440"/>
           </a:xfrm>
           <a:prstGeom prst="rect">
             <a:avLst/>
@@ -1473,7 +1473,7 @@
                   <a:srgbClr val="8FA3C0"/>
                 </a:solidFill>
               </a:rPr>
-              <a:t>71% concluido  .  253 de 358 itens</a:t>
+              <a:t>72% concluido  .  256 de 358 itens</a:t>
             </a:r>
             <a:endParaRPr lang="en-US" sz="700" dirty="0"/>
           </a:p>
@@ -1854,7 +1854,7 @@
                   <a:srgbClr val="222222"/>
                 </a:solidFill>
               </a:rPr>
-              <a:t>A Fazer: 9 . Em progresso: 1 . Finalizados: 59</a:t>
+              <a:t>A Fazer: 7 . Em progresso: 1 . Finalizados: 61</a:t>
             </a:r>
             <a:endParaRPr lang="en-US" sz="750" dirty="0"/>
           </a:p>
@@ -1890,7 +1890,7 @@
                   <a:srgbClr val="222222"/>
                 </a:solidFill>
               </a:rPr>
-              <a:t>Est: 274h . Real: 240.2h . Rem: 36.5h</a:t>
+              <a:t>Est: 274h . Real: 249.2h . Rem: 23.5h</a:t>
             </a:r>
             <a:endParaRPr lang="en-US" sz="750" dirty="0"/>
           </a:p>
@@ -2016,7 +2016,7 @@
         <p:spPr>
           <a:xfrm>
             <a:off x="2514600" y="1033272"/>
-            <a:ext cx="1895185" cy="50292"/>
+            <a:ext cx="1939260" cy="50292"/>
           </a:xfrm>
           <a:prstGeom prst="rect">
             <a:avLst/>
@@ -2062,7 +2062,7 @@
                   <a:srgbClr val="888888"/>
                 </a:solidFill>
               </a:rPr>
-              <a:t>Subs: 86% · 59 de 69</a:t>
+              <a:t>Subs: 88% · 61 de 69</a:t>
             </a:r>
             <a:endParaRPr lang="en-US" sz="650" dirty="0"/>
           </a:p>
@@ -2098,7 +2098,7 @@
                   <a:srgbClr val="1D9E75"/>
                 </a:solidFill>
               </a:rPr>
-              <a:t>Projetado: 276.7h (+2.7h / +1%)</a:t>
+              <a:t>Projetado: 272.7h (-1.3h / +0%)</a:t>
             </a:r>
             <a:endParaRPr lang="en-US" sz="800" dirty="0"/>
           </a:p>
@@ -2263,7 +2263,7 @@
                   <a:srgbClr val="222222"/>
                 </a:solidFill>
               </a:rPr>
-              <a:t>A Fazer: 12 . Em progresso: 3 . Finalizados: 86</a:t>
+              <a:t>A Fazer: 12 . Em progresso: 2 . Finalizados: 87</a:t>
             </a:r>
             <a:endParaRPr lang="en-US" sz="750" dirty="0"/>
           </a:p>
@@ -2299,7 +2299,7 @@
                   <a:srgbClr val="222222"/>
                 </a:solidFill>
               </a:rPr>
-              <a:t>Est: 402h . Real: 462.4h . Rem: 15.5h</a:t>
+              <a:t>Est: 402h . Real: 468.4h . Rem: 12.5h</a:t>
             </a:r>
             <a:endParaRPr lang="en-US" sz="750" dirty="0"/>
           </a:p>
@@ -2425,7 +2425,7 @@
         <p:spPr>
           <a:xfrm>
             <a:off x="4946904" y="1033272"/>
-            <a:ext cx="1873148" cy="50292"/>
+            <a:ext cx="1895185" cy="50292"/>
           </a:xfrm>
           <a:prstGeom prst="rect">
             <a:avLst/>
@@ -2471,7 +2471,7 @@
                   <a:srgbClr val="888888"/>
                 </a:solidFill>
               </a:rPr>
-              <a:t>Subs: 85% · 86 de 101</a:t>
+              <a:t>Subs: 86% · 87 de 101</a:t>
             </a:r>
             <a:endParaRPr lang="en-US" sz="650" dirty="0"/>
           </a:p>
@@ -2507,7 +2507,7 @@
                   <a:srgbClr val="D97706"/>
                 </a:solidFill>
               </a:rPr>
-              <a:t>Projetado: 477.9h (+75.9h / +19%)</a:t>
+              <a:t>Projetado: 480.9h (+78.9h / +20%)</a:t>
             </a:r>
             <a:endParaRPr lang="en-US" sz="800" dirty="0"/>
           </a:p>
@@ -3803,7 +3803,7 @@
                   <a:srgbClr val="D97706"/>
                 </a:solidFill>
               </a:rPr>
-              <a:t>1057.5h</a:t>
+              <a:t>1072.5h</a:t>
             </a:r>
             <a:endParaRPr lang="en-US" sz="2400" dirty="0"/>
           </a:p>
@@ -3936,7 +3936,7 @@
                   <a:srgbClr val="F87171"/>
                 </a:solidFill>
               </a:rPr>
-              <a:t>322.5h</a:t>
+              <a:t>306.5h</a:t>
             </a:r>
             <a:endParaRPr lang="en-US" sz="2400" dirty="0"/>
           </a:p>
@@ -4069,7 +4069,7 @@
                   <a:srgbClr val="D97706"/>
                 </a:solidFill>
               </a:rPr>
-              <a:t>+172.5h</a:t>
+              <a:t>+171.5h</a:t>
             </a:r>
             <a:endParaRPr lang="en-US" sz="2400" dirty="0"/>
           </a:p>
@@ -4105,7 +4105,7 @@
                   <a:srgbClr val="888888"/>
                 </a:solidFill>
               </a:rPr>
-              <a:t>projetado: 1380h (+14%)</a:t>
+              <a:t>projetado: 1379h (+14%)</a:t>
             </a:r>
             <a:endParaRPr lang="en-US" sz="700" dirty="0"/>
           </a:p>
@@ -4120,7 +4120,7 @@
         <p:spPr>
           <a:xfrm>
             <a:off x="2441448" y="2916936"/>
-            <a:ext cx="7392477" cy="54864"/>
+            <a:ext cx="7502771" cy="54864"/>
           </a:xfrm>
           <a:prstGeom prst="rect">
             <a:avLst/>
@@ -4144,8 +4144,8 @@
         </p:nvSpPr>
         <p:spPr>
           <a:xfrm>
-            <a:off x="9833925" y="2916936"/>
-            <a:ext cx="2254443" cy="54864"/>
+            <a:off x="9944219" y="2916936"/>
+            <a:ext cx="2144149" cy="54864"/>
           </a:xfrm>
           <a:prstGeom prst="rect">
             <a:avLst/>
@@ -4286,7 +4286,7 @@
                   <a:srgbClr val="0F6E56"/>
                 </a:solidFill>
               </a:rPr>
-              <a:t>86% concluido</a:t>
+              <a:t>88% concluido</a:t>
             </a:r>
             <a:endParaRPr lang="en-US" sz="650" dirty="0"/>
           </a:p>
@@ -4326,7 +4326,7 @@
         <p:spPr>
           <a:xfrm>
             <a:off x="2551176" y="3291840"/>
-            <a:ext cx="3920124" cy="64008"/>
+            <a:ext cx="4011290" cy="64008"/>
           </a:xfrm>
           <a:prstGeom prst="rect">
             <a:avLst/>
@@ -5203,7 +5203,7 @@
                   <a:srgbClr val="D85A30"/>
                 </a:solidFill>
               </a:rPr>
-              <a:t>19.7%</a:t>
+              <a:t>19.8%</a:t>
             </a:r>
             <a:endParaRPr lang="en-US" sz="2200" dirty="0"/>
           </a:p>
@@ -5336,7 +5336,7 @@
                   <a:srgbClr val="534AB7"/>
                 </a:solidFill>
               </a:rPr>
-              <a:t>8.4%</a:t>
+              <a:t>8.2%</a:t>
             </a:r>
             <a:endParaRPr lang="en-US" sz="2200" dirty="0"/>
           </a:p>
@@ -5469,7 +5469,7 @@
                   <a:srgbClr val="1D9E75"/>
                 </a:solidFill>
               </a:rPr>
-              <a:t>80.3%</a:t>
+              <a:t>80.2%</a:t>
             </a:r>
             <a:endParaRPr lang="en-US" sz="2200" dirty="0"/>
           </a:p>
@@ -6651,7 +6651,7 @@
         <p:spPr>
           <a:xfrm>
             <a:off x="2496312" y="6153912"/>
-            <a:ext cx="1137108" cy="73152"/>
+            <a:ext cx="1097989" cy="73152"/>
           </a:xfrm>
           <a:prstGeom prst="rect">
             <a:avLst/>
@@ -6697,7 +6697,7 @@
                   <a:srgbClr val="1D9E75"/>
                 </a:solidFill>
               </a:rPr>
-              <a:t>164.7h · 33 subs finalizadas</a:t>
+              <a:t>173.7h · 35 subs finalizadas</a:t>
             </a:r>
             <a:endParaRPr lang="en-US" sz="950" dirty="0"/>
           </a:p>
@@ -6733,7 +6733,7 @@
                   <a:srgbClr val="888888"/>
                 </a:solidFill>
               </a:rPr>
-              <a:t>173.5h estimadas</a:t>
+              <a:t>189.5h estimadas</a:t>
             </a:r>
             <a:endParaRPr lang="en-US" sz="850" dirty="0"/>
           </a:p>
@@ -7267,7 +7267,7 @@
                   <a:srgbClr val="D85A30"/>
                 </a:solidFill>
               </a:rPr>
-              <a:t>65.5h · 17 subs finalizadas</a:t>
+              <a:t>71.5h · 18 subs finalizadas</a:t>
             </a:r>
             <a:endParaRPr lang="en-US" sz="950" dirty="0"/>
           </a:p>

--- a/Quadro_Aulas_Report_2026-06-10.pptx
+++ b/Quadro_Aulas_Report_2026-06-10.pptx
@@ -1038,7 +1038,7 @@
                   <a:srgbClr val="8FA3C0"/>
                 </a:solidFill>
               </a:rPr>
-              <a:t>10 de Junho de 2026 as 09:58</a:t>
+              <a:t>10 de Junho de 2026 as 16:39</a:t>
             </a:r>
             <a:endParaRPr lang="en-US" sz="700" dirty="0"/>
           </a:p>
@@ -1135,7 +1135,7 @@
                   <a:srgbClr val="FFFFFF"/>
                 </a:solidFill>
               </a:rPr>
-              <a:t>358</a:t>
+              <a:t>359</a:t>
             </a:r>
             <a:endParaRPr lang="en-US" sz="2400" dirty="0"/>
           </a:p>
@@ -1207,7 +1207,7 @@
                   <a:srgbClr val="4ADE80"/>
                 </a:solidFill>
               </a:rPr>
-              <a:t>256</a:t>
+              <a:t>258</a:t>
             </a:r>
             <a:endParaRPr lang="en-US" sz="2400" dirty="0"/>
           </a:p>
@@ -1279,7 +1279,7 @@
                   <a:srgbClr val="FCD34D"/>
                 </a:solidFill>
               </a:rPr>
-              <a:t>15</a:t>
+              <a:t>16</a:t>
             </a:r>
             <a:endParaRPr lang="en-US" sz="2400" dirty="0"/>
           </a:p>
@@ -1351,7 +1351,7 @@
                   <a:srgbClr val="F87171"/>
                 </a:solidFill>
               </a:rPr>
-              <a:t>77</a:t>
+              <a:t>75</a:t>
             </a:r>
             <a:endParaRPr lang="en-US" sz="2400" dirty="0"/>
           </a:p>
@@ -1473,7 +1473,7 @@
                   <a:srgbClr val="8FA3C0"/>
                 </a:solidFill>
               </a:rPr>
-              <a:t>72% concluido  .  256 de 358 itens</a:t>
+              <a:t>72% concluido  .  258 de 359 itens</a:t>
             </a:r>
             <a:endParaRPr lang="en-US" sz="700" dirty="0"/>
           </a:p>
@@ -3286,7 +3286,7 @@
                   <a:srgbClr val="222222"/>
                 </a:solidFill>
               </a:rPr>
-              <a:t>A Fazer: 57 . Em progresso: 1 . Finalizados: 49</a:t>
+              <a:t>A Fazer: 55 . Em progresso: 1 . Finalizados: 51</a:t>
             </a:r>
             <a:endParaRPr lang="en-US" sz="750" dirty="0"/>
           </a:p>
@@ -3322,7 +3322,7 @@
                   <a:srgbClr val="222222"/>
                 </a:solidFill>
               </a:rPr>
-              <a:t>Est: 488.5h . Real: 191.5h . Rem: 270.5h</a:t>
+              <a:t>Est: 488.5h . Real: 193.5h . Rem: 270.5h</a:t>
             </a:r>
             <a:endParaRPr lang="en-US" sz="750" dirty="0"/>
           </a:p>
@@ -3448,7 +3448,7 @@
         <p:spPr>
           <a:xfrm>
             <a:off x="9811512" y="1033272"/>
-            <a:ext cx="1013704" cy="50292"/>
+            <a:ext cx="1057778" cy="50292"/>
           </a:xfrm>
           <a:prstGeom prst="rect">
             <a:avLst/>
@@ -3494,7 +3494,7 @@
                   <a:srgbClr val="888888"/>
                 </a:solidFill>
               </a:rPr>
-              <a:t>Subs: 46% · 49 de 107</a:t>
+              <a:t>Subs: 48% · 51 de 107</a:t>
             </a:r>
             <a:endParaRPr lang="en-US" sz="650" dirty="0"/>
           </a:p>
@@ -3530,7 +3530,7 @@
                   <a:srgbClr val="1D9E75"/>
                 </a:solidFill>
               </a:rPr>
-              <a:t>Projetado: 462h (-26.5h / -5%)</a:t>
+              <a:t>Projetado: 464h (-24.5h / -5%)</a:t>
             </a:r>
             <a:endParaRPr lang="en-US" sz="800" dirty="0"/>
           </a:p>
@@ -3670,7 +3670,7 @@
                   <a:srgbClr val="222222"/>
                 </a:solidFill>
               </a:rPr>
-              <a:t>1207.5h</a:t>
+              <a:t>1210.5h</a:t>
             </a:r>
             <a:endParaRPr lang="en-US" sz="2400" dirty="0"/>
           </a:p>
@@ -3803,7 +3803,7 @@
                   <a:srgbClr val="D97706"/>
                 </a:solidFill>
               </a:rPr>
-              <a:t>1072.5h</a:t>
+              <a:t>1074.5h</a:t>
             </a:r>
             <a:endParaRPr lang="en-US" sz="2400" dirty="0"/>
           </a:p>
@@ -3936,7 +3936,7 @@
                   <a:srgbClr val="F87171"/>
                 </a:solidFill>
               </a:rPr>
-              <a:t>306.5h</a:t>
+              <a:t>309.5h</a:t>
             </a:r>
             <a:endParaRPr lang="en-US" sz="2400" dirty="0"/>
           </a:p>
@@ -4069,7 +4069,7 @@
                   <a:srgbClr val="D97706"/>
                 </a:solidFill>
               </a:rPr>
-              <a:t>+171.5h</a:t>
+              <a:t>+173.5h</a:t>
             </a:r>
             <a:endParaRPr lang="en-US" sz="2400" dirty="0"/>
           </a:p>
@@ -4105,7 +4105,7 @@
                   <a:srgbClr val="888888"/>
                 </a:solidFill>
               </a:rPr>
-              <a:t>projetado: 1379h (+14%)</a:t>
+              <a:t>projetado: 1384h (+14%)</a:t>
             </a:r>
             <a:endParaRPr lang="en-US" sz="700" dirty="0"/>
           </a:p>
@@ -4120,7 +4120,7 @@
         <p:spPr>
           <a:xfrm>
             <a:off x="2441448" y="2916936"/>
-            <a:ext cx="7502771" cy="54864"/>
+            <a:ext cx="7489607" cy="54864"/>
           </a:xfrm>
           <a:prstGeom prst="rect">
             <a:avLst/>
@@ -4144,8 +4144,8 @@
         </p:nvSpPr>
         <p:spPr>
           <a:xfrm>
-            <a:off x="9944219" y="2916936"/>
-            <a:ext cx="2144149" cy="54864"/>
+            <a:off x="9931055" y="2916936"/>
+            <a:ext cx="2157313" cy="54864"/>
           </a:xfrm>
           <a:prstGeom prst="rect">
             <a:avLst/>
@@ -4758,7 +4758,7 @@
                   <a:srgbClr val="991B1B"/>
                 </a:solidFill>
               </a:rPr>
-              <a:t>46% concluido</a:t>
+              <a:t>48% concluido</a:t>
             </a:r>
             <a:endParaRPr lang="en-US" sz="650" dirty="0"/>
           </a:p>
@@ -4798,7 +4798,7 @@
         <p:spPr>
           <a:xfrm>
             <a:off x="7420356" y="3291840"/>
-            <a:ext cx="2096811" cy="64008"/>
+            <a:ext cx="2187976" cy="64008"/>
           </a:xfrm>
           <a:prstGeom prst="rect">
             <a:avLst/>
@@ -5408,7 +5408,7 @@
                   <a:srgbClr val="888888"/>
                 </a:solidFill>
               </a:rPr>
-              <a:t>15 Sub Bug . 81.3h realizadas</a:t>
+              <a:t>15 Sub Bug . 83.3h realizadas</a:t>
             </a:r>
             <a:endParaRPr lang="en-US" sz="700" dirty="0"/>
           </a:p>
@@ -6335,7 +6335,7 @@
                   <a:srgbClr val="FFFFFF"/>
                 </a:solidFill>
               </a:rPr>
-              <a:t>95</a:t>
+              <a:t>96</a:t>
             </a:r>
             <a:endParaRPr lang="en-US" sz="650" dirty="0"/>
           </a:p>
@@ -6385,7 +6385,7 @@
                   <a:srgbClr val="222222"/>
                 </a:solidFill>
               </a:rPr>
-              <a:t>95 itens criados pos 01/05</a:t>
+              <a:t>96 itens criados pos 01/05</a:t>
             </a:r>
             <a:endParaRPr lang="en-US" sz="750" dirty="0"/>
           </a:p>
@@ -7113,7 +7113,7 @@
                   <a:srgbClr val="888888"/>
                 </a:solidFill>
               </a:rPr>
-              <a:t>214h estimadas</a:t>
+              <a:t>217h estimadas</a:t>
             </a:r>
             <a:endParaRPr lang="en-US" sz="850" dirty="0"/>
           </a:p>
@@ -7457,7 +7457,7 @@
                   <a:srgbClr val="D97706"/>
                 </a:solidFill>
               </a:rPr>
-              <a:t>164.5h · 21 subs finalizadas</a:t>
+              <a:t>166.5h · 23 subs finalizadas</a:t>
             </a:r>
             <a:endParaRPr lang="en-US" sz="950" dirty="0"/>
           </a:p>
